--- a/site/clases/parte-1-machine-learning-clasico/072-curvas-de-aprendizaje-bias-variance/clase-072-curvas-de-aprendizaje-bias-variance-presentacion.pptx
+++ b/site/clases/parte-1-machine-learning-clasico/072-curvas-de-aprendizaje-bias-variance/clase-072-curvas-de-aprendizaje-bias-variance-presentacion.pptx
@@ -3272,7 +3272,7 @@
                 </a:solidFill>
                 <a:latin typeface="Segoe UI"/>
               </a:rPr>
-              <a:t>Parte: 1 — Machine Learning Clásico · Fuente: Géron, cap. 4.  Duración estimada: 60 min.</a:t>
+              <a:t>Parte: 1 — Machine Learning Clásico · Fuente: Géron, cap. 4.  Duración estimada: 60 min. · Nivel: Intermedio</a:t>
             </a:r>
           </a:p>
         </p:txBody>
@@ -3601,7 +3601,7 @@
                 </a:solidFill>
                 <a:latin typeface="Segoe UI"/>
               </a:rPr>
-              <a:t>Parte: 1 — Machine Learning Clásico · Fuente: Géron, cap. 4.  Duración estimada: 60 min.</a:t>
+              <a:t>Parte: 1 — Machine Learning Clásico · Fuente: Géron, cap. 4.  Duración estimada: 60 min. · Nivel: Intermedio</a:t>
             </a:r>
           </a:p>
         </p:txBody>
@@ -4885,7 +4885,7 @@
                 </a:solidFill>
                 <a:latin typeface="Segoe UI"/>
               </a:rPr>
-              <a:t>Primer bloque ejecutable del notebook.</a:t>
+              <a:t>$y = 0.5x^2 + x + 2 + \varepsilon$, con $\varepsilon\sim\mathcal{N}(0, \sigma^2)$ y $\sigma=1$. Conocer $\sigma$ nos permite comparar el error irreducible con la varianza medida.</a:t>
             </a:r>
           </a:p>
         </p:txBody>
@@ -4972,7 +4972,159 @@
                 </a:solidFill>
                 <a:latin typeface="Courier New"/>
               </a:rPr>
-              <a:t># Imports y configuración inicial</a:t>
+              <a:t>import numpy as np</a:t>
+            </a:r>
+          </a:p>
+          <a:p>
+            <a:pPr>
+              <a:defRPr sz="1200" b="0">
+                <a:solidFill>
+                  <a:srgbClr val="F8FAFC"/>
+                </a:solidFill>
+                <a:latin typeface="Courier New"/>
+              </a:defRPr>
+            </a:pPr>
+            <a:r>
+              <a:rPr sz="1200" b="0">
+                <a:solidFill>
+                  <a:srgbClr val="F8FAFC"/>
+                </a:solidFill>
+                <a:latin typeface="Courier New"/>
+              </a:rPr>
+              <a:t>import matplotlib.pyplot as plt</a:t>
+            </a:r>
+          </a:p>
+          <a:p>
+            <a:pPr>
+              <a:defRPr sz="1200" b="0">
+                <a:solidFill>
+                  <a:srgbClr val="F8FAFC"/>
+                </a:solidFill>
+                <a:latin typeface="Courier New"/>
+              </a:defRPr>
+            </a:pPr>
+            <a:r>
+              <a:rPr sz="1200" b="0">
+                <a:solidFill>
+                  <a:srgbClr val="F8FAFC"/>
+                </a:solidFill>
+                <a:latin typeface="Courier New"/>
+              </a:rPr>
+              <a:t> </a:t>
+            </a:r>
+          </a:p>
+          <a:p>
+            <a:pPr>
+              <a:defRPr sz="1200" b="0">
+                <a:solidFill>
+                  <a:srgbClr val="F8FAFC"/>
+                </a:solidFill>
+                <a:latin typeface="Courier New"/>
+              </a:defRPr>
+            </a:pPr>
+            <a:r>
+              <a:rPr sz="1200" b="0">
+                <a:solidFill>
+                  <a:srgbClr val="F8FAFC"/>
+                </a:solidFill>
+                <a:latin typeface="Courier New"/>
+              </a:rPr>
+              <a:t>np.random.seed(42)</a:t>
+            </a:r>
+          </a:p>
+          <a:p>
+            <a:pPr>
+              <a:defRPr sz="1200" b="0">
+                <a:solidFill>
+                  <a:srgbClr val="F8FAFC"/>
+                </a:solidFill>
+                <a:latin typeface="Courier New"/>
+              </a:defRPr>
+            </a:pPr>
+            <a:r>
+              <a:rPr sz="1200" b="0">
+                <a:solidFill>
+                  <a:srgbClr val="F8FAFC"/>
+                </a:solidFill>
+                <a:latin typeface="Courier New"/>
+              </a:rPr>
+              <a:t>m = 200</a:t>
+            </a:r>
+          </a:p>
+          <a:p>
+            <a:pPr>
+              <a:defRPr sz="1200" b="0">
+                <a:solidFill>
+                  <a:srgbClr val="F8FAFC"/>
+                </a:solidFill>
+                <a:latin typeface="Courier New"/>
+              </a:defRPr>
+            </a:pPr>
+            <a:r>
+              <a:rPr sz="1200" b="0">
+                <a:solidFill>
+                  <a:srgbClr val="F8FAFC"/>
+                </a:solidFill>
+                <a:latin typeface="Courier New"/>
+              </a:rPr>
+              <a:t>X = 6 * np.random.rand(m, 1) - 3</a:t>
+            </a:r>
+          </a:p>
+          <a:p>
+            <a:pPr>
+              <a:defRPr sz="1200" b="0">
+                <a:solidFill>
+                  <a:srgbClr val="F8FAFC"/>
+                </a:solidFill>
+                <a:latin typeface="Courier New"/>
+              </a:defRPr>
+            </a:pPr>
+            <a:r>
+              <a:rPr sz="1200" b="0">
+                <a:solidFill>
+                  <a:srgbClr val="F8FAFC"/>
+                </a:solidFill>
+                <a:latin typeface="Courier New"/>
+              </a:rPr>
+              <a:t>sigma = 1.0</a:t>
+            </a:r>
+          </a:p>
+          <a:p>
+            <a:pPr>
+              <a:defRPr sz="1200" b="0">
+                <a:solidFill>
+                  <a:srgbClr val="F8FAFC"/>
+                </a:solidFill>
+                <a:latin typeface="Courier New"/>
+              </a:defRPr>
+            </a:pPr>
+            <a:r>
+              <a:rPr sz="1200" b="0">
+                <a:solidFill>
+                  <a:srgbClr val="F8FAFC"/>
+                </a:solidFill>
+                <a:latin typeface="Courier New"/>
+              </a:rPr>
+              <a:t>y = 0.5 * X[:, 0]**2 + X[:, 0] + 2 + np.random.randn(m) * sigma</a:t>
+            </a:r>
+          </a:p>
+          <a:p>
+            <a:pPr>
+              <a:defRPr sz="1200" b="0">
+                <a:solidFill>
+                  <a:srgbClr val="F8FAFC"/>
+                </a:solidFill>
+                <a:latin typeface="Courier New"/>
+              </a:defRPr>
+            </a:pPr>
+            <a:r>
+              <a:rPr sz="1200" b="0">
+                <a:solidFill>
+                  <a:srgbClr val="F8FAFC"/>
+                </a:solidFill>
+                <a:latin typeface="Courier New"/>
+              </a:rPr>
+              <a:t>print('dataset:', X.shape, '| ruido σ =', sigma, '| σ² =', sigma**2)</a:t>
             </a:r>
           </a:p>
         </p:txBody>
